--- a/assets/powerpoints/module-vetements/E1-je-me-lance.pptx
+++ b/assets/powerpoints/module-vetements/E1-je-me-lance.pptx
@@ -6672,7 +6672,97 @@
                 </a:solidFill>
                 <a:latin typeface="Verdana"/>
               </a:rPr>
-              <a:t>Dans l'activité interactive : le &lt;b&gt;manteau&lt;/b&gt; (essayer et choisir), les &lt;b&gt;bottes&lt;/b&gt; (la pointure d'un enfant), l'&lt;b&gt;échange&lt;/b&gt; (au service à la clientèle). Vous choisissez d'être le &lt;b&gt;client&lt;/b&gt; ou le &lt;b&gt;conseiller&lt;/b&gt; — faites les deux, ils n'emploient pas les mêmes phrases.</a:t>
+              <a:t>Dans l'activité interactive : le </a:t>
+            </a:r>
+            <a:r>
+              <a:rPr sz="2000" b="1" i="0">
+                <a:solidFill>
+                  <a:srgbClr val="4B4F52"/>
+                </a:solidFill>
+                <a:latin typeface="Verdana"/>
+              </a:rPr>
+              <a:t>manteau</a:t>
+            </a:r>
+            <a:r>
+              <a:rPr sz="2000" b="0" i="0">
+                <a:solidFill>
+                  <a:srgbClr val="4B4F52"/>
+                </a:solidFill>
+                <a:latin typeface="Verdana"/>
+              </a:rPr>
+              <a:t> (essayer et choisir), les </a:t>
+            </a:r>
+            <a:r>
+              <a:rPr sz="2000" b="1" i="0">
+                <a:solidFill>
+                  <a:srgbClr val="4B4F52"/>
+                </a:solidFill>
+                <a:latin typeface="Verdana"/>
+              </a:rPr>
+              <a:t>bottes</a:t>
+            </a:r>
+            <a:r>
+              <a:rPr sz="2000" b="0" i="0">
+                <a:solidFill>
+                  <a:srgbClr val="4B4F52"/>
+                </a:solidFill>
+                <a:latin typeface="Verdana"/>
+              </a:rPr>
+              <a:t> (la pointure d'un enfant), l'</a:t>
+            </a:r>
+            <a:r>
+              <a:rPr sz="2000" b="1" i="0">
+                <a:solidFill>
+                  <a:srgbClr val="4B4F52"/>
+                </a:solidFill>
+                <a:latin typeface="Verdana"/>
+              </a:rPr>
+              <a:t>échange</a:t>
+            </a:r>
+            <a:r>
+              <a:rPr sz="2000" b="0" i="0">
+                <a:solidFill>
+                  <a:srgbClr val="4B4F52"/>
+                </a:solidFill>
+                <a:latin typeface="Verdana"/>
+              </a:rPr>
+              <a:t> (au service à la clientèle). Vous choisissez d'être le </a:t>
+            </a:r>
+            <a:r>
+              <a:rPr sz="2000" b="1" i="0">
+                <a:solidFill>
+                  <a:srgbClr val="4B4F52"/>
+                </a:solidFill>
+                <a:latin typeface="Verdana"/>
+              </a:rPr>
+              <a:t>client</a:t>
+            </a:r>
+            <a:r>
+              <a:rPr sz="2000" b="0" i="0">
+                <a:solidFill>
+                  <a:srgbClr val="4B4F52"/>
+                </a:solidFill>
+                <a:latin typeface="Verdana"/>
+              </a:rPr>
+              <a:t> ou le </a:t>
+            </a:r>
+            <a:r>
+              <a:rPr sz="2000" b="1" i="0">
+                <a:solidFill>
+                  <a:srgbClr val="4B4F52"/>
+                </a:solidFill>
+                <a:latin typeface="Verdana"/>
+              </a:rPr>
+              <a:t>conseiller</a:t>
+            </a:r>
+            <a:r>
+              <a:rPr sz="2000" b="0" i="0">
+                <a:solidFill>
+                  <a:srgbClr val="4B4F52"/>
+                </a:solidFill>
+                <a:latin typeface="Verdana"/>
+              </a:rPr>
+              <a:t> — faites les deux, ils n'emploient pas les mêmes phrases.</a:t>
             </a:r>
           </a:p>
         </p:txBody>

--- a/assets/powerpoints/module-vetements/E1-je-me-lance.pptx
+++ b/assets/powerpoints/module-vetements/E1-je-me-lance.pptx
@@ -10536,7 +10536,7 @@
                 </a:solidFill>
                 <a:latin typeface="Verdana"/>
               </a:rPr>
-              <a:t>Six panneaux « En apprendre plus » dans l'activité, avec l'audio. Ils restent ouverts pendant la production.</a:t>
+              <a:t>Six panneaux « Ouvrir la mini-leçon » dans l'activité, avec l'audio. Ils restent ouverts pendant la production.</a:t>
             </a:r>
           </a:p>
         </p:txBody>
